--- a/Isaac SBA Report.pptx
+++ b/Isaac SBA Report.pptx
@@ -9,9 +9,9 @@
   </p:notesMasterIdLst>
   <p:sldIdLst>
     <p:sldId id="256" r:id="rId2"/>
-    <p:sldId id="258" r:id="rId3"/>
+    <p:sldId id="267" r:id="rId3"/>
     <p:sldId id="259" r:id="rId4"/>
-    <p:sldId id="265" r:id="rId5"/>
+    <p:sldId id="266" r:id="rId5"/>
     <p:sldId id="257" r:id="rId6"/>
     <p:sldId id="260" r:id="rId7"/>
     <p:sldId id="261" r:id="rId8"/>
@@ -257,6 +257,11 @@
       </a:defRPr>
     </a:lvl9pPr>
   </p:defaultTextStyle>
+  <p:extLst>
+    <p:ext uri="{EFAFB233-063F-42B5-8137-9DF3F51BA10A}">
+      <p15:sldGuideLst xmlns:p15="http://schemas.microsoft.com/office/powerpoint/2012/main"/>
+    </p:ext>
+  </p:extLst>
 </p:presentation>
 </file>
 
@@ -768,6 +773,110 @@
         </p:nvSpPr>
         <p:spPr>
           <a:xfrm>
+            <a:off x="381000" y="685800"/>
+            <a:ext cx="6096000" cy="3429000"/>
+          </a:xfrm>
+          <a:custGeom>
+            <a:avLst/>
+            <a:gdLst/>
+            <a:ahLst/>
+            <a:cxnLst/>
+            <a:rect l="l" t="t" r="r" b="b"/>
+            <a:pathLst>
+              <a:path w="120000" h="120000" extrusionOk="0">
+                <a:moveTo>
+                  <a:pt x="0" y="0"/>
+                </a:moveTo>
+                <a:lnTo>
+                  <a:pt x="120000" y="0"/>
+                </a:lnTo>
+                <a:lnTo>
+                  <a:pt x="120000" y="120000"/>
+                </a:lnTo>
+                <a:lnTo>
+                  <a:pt x="0" y="120000"/>
+                </a:lnTo>
+                <a:close/>
+              </a:path>
+            </a:pathLst>
+          </a:custGeom>
+        </p:spPr>
+      </p:sp>
+    </p:spTree>
+  </p:cSld>
+  <p:clrMapOvr>
+    <a:masterClrMapping/>
+  </p:clrMapOvr>
+</p:notes>
+</file>
+
+<file path=ppt/notesSlides/notesSlide10.xml><?xml version="1.0" encoding="utf-8"?>
+<p:notes xmlns:a="http://schemas.openxmlformats.org/drawingml/2006/main" xmlns:r="http://schemas.openxmlformats.org/officeDocument/2006/relationships" xmlns:p="http://schemas.openxmlformats.org/presentationml/2006/main" showMasterSp="0" showMasterPhAnim="0">
+  <p:cSld>
+    <p:spTree>
+      <p:nvGrpSpPr>
+        <p:cNvPr id="1" name="Shape 128"/>
+        <p:cNvGrpSpPr/>
+        <p:nvPr/>
+      </p:nvGrpSpPr>
+      <p:grpSpPr>
+        <a:xfrm>
+          <a:off x="0" y="0"/>
+          <a:ext cx="0" cy="0"/>
+          <a:chOff x="0" y="0"/>
+          <a:chExt cx="0" cy="0"/>
+        </a:xfrm>
+      </p:grpSpPr>
+      <p:sp>
+        <p:nvSpPr>
+          <p:cNvPr id="129" name="Google Shape;129;p9:notes"/>
+          <p:cNvSpPr txBox="1">
+            <a:spLocks noGrp="1"/>
+          </p:cNvSpPr>
+          <p:nvPr>
+            <p:ph type="body" idx="1"/>
+          </p:nvPr>
+        </p:nvSpPr>
+        <p:spPr>
+          <a:xfrm>
+            <a:off x="685800" y="4343400"/>
+            <a:ext cx="5486400" cy="4114800"/>
+          </a:xfrm>
+          <a:prstGeom prst="rect">
+            <a:avLst/>
+          </a:prstGeom>
+        </p:spPr>
+        <p:txBody>
+          <a:bodyPr spcFirstLastPara="1" wrap="square" lIns="91425" tIns="91425" rIns="91425" bIns="91425" anchor="t" anchorCtr="0">
+            <a:noAutofit/>
+          </a:bodyPr>
+          <a:lstStyle/>
+          <a:p>
+            <a:pPr marL="0" lvl="0" indent="0" algn="l" rtl="0">
+              <a:spcBef>
+                <a:spcPts val="0"/>
+              </a:spcBef>
+              <a:spcAft>
+                <a:spcPts val="0"/>
+              </a:spcAft>
+              <a:buNone/>
+            </a:pPr>
+            <a:endParaRPr/>
+          </a:p>
+        </p:txBody>
+      </p:sp>
+      <p:sp>
+        <p:nvSpPr>
+          <p:cNvPr id="130" name="Google Shape;130;p9:notes"/>
+          <p:cNvSpPr>
+            <a:spLocks noGrp="1" noRot="1" noChangeAspect="1"/>
+          </p:cNvSpPr>
+          <p:nvPr>
+            <p:ph type="sldImg" idx="2"/>
+          </p:nvPr>
+        </p:nvSpPr>
+        <p:spPr>
+          <a:xfrm>
             <a:off x="1143225" y="685800"/>
             <a:ext cx="4572225" cy="3429000"/>
           </a:xfrm>
@@ -810,7 +919,7 @@
   <p:cSld>
     <p:spTree>
       <p:nvGrpSpPr>
-        <p:cNvPr id="1" name="Shape 92"/>
+        <p:cNvPr id="1" name="Shape 98"/>
         <p:cNvGrpSpPr/>
         <p:nvPr/>
       </p:nvGrpSpPr>
@@ -824,7 +933,7 @@
       </p:grpSpPr>
       <p:sp>
         <p:nvSpPr>
-          <p:cNvPr id="93" name="Google Shape;93;p3:notes"/>
+          <p:cNvPr id="99" name="Google Shape;99;p4:notes"/>
           <p:cNvSpPr txBox="1">
             <a:spLocks noGrp="1"/>
           </p:cNvSpPr>
@@ -862,7 +971,7 @@
       </p:sp>
       <p:sp>
         <p:nvSpPr>
-          <p:cNvPr id="94" name="Google Shape;94;p3:notes"/>
+          <p:cNvPr id="100" name="Google Shape;100;p4:notes"/>
           <p:cNvSpPr>
             <a:spLocks noGrp="1" noRot="1" noChangeAspect="1"/>
           </p:cNvSpPr>
@@ -902,6 +1011,11 @@
         </p:spPr>
       </p:sp>
     </p:spTree>
+    <p:extLst>
+      <p:ext uri="{BB962C8B-B14F-4D97-AF65-F5344CB8AC3E}">
+        <p14:creationId xmlns:p14="http://schemas.microsoft.com/office/powerpoint/2010/main" val="3066853235"/>
+      </p:ext>
+    </p:extLst>
   </p:cSld>
   <p:clrMapOvr>
     <a:masterClrMapping/>
@@ -1018,6 +1132,115 @@
   <p:cSld>
     <p:spTree>
       <p:nvGrpSpPr>
+        <p:cNvPr id="1" name="Shape 98"/>
+        <p:cNvGrpSpPr/>
+        <p:nvPr/>
+      </p:nvGrpSpPr>
+      <p:grpSpPr>
+        <a:xfrm>
+          <a:off x="0" y="0"/>
+          <a:ext cx="0" cy="0"/>
+          <a:chOff x="0" y="0"/>
+          <a:chExt cx="0" cy="0"/>
+        </a:xfrm>
+      </p:grpSpPr>
+      <p:sp>
+        <p:nvSpPr>
+          <p:cNvPr id="99" name="Google Shape;99;p4:notes"/>
+          <p:cNvSpPr txBox="1">
+            <a:spLocks noGrp="1"/>
+          </p:cNvSpPr>
+          <p:nvPr>
+            <p:ph type="body" idx="1"/>
+          </p:nvPr>
+        </p:nvSpPr>
+        <p:spPr>
+          <a:xfrm>
+            <a:off x="685800" y="4343400"/>
+            <a:ext cx="5486400" cy="4114800"/>
+          </a:xfrm>
+          <a:prstGeom prst="rect">
+            <a:avLst/>
+          </a:prstGeom>
+        </p:spPr>
+        <p:txBody>
+          <a:bodyPr spcFirstLastPara="1" wrap="square" lIns="91425" tIns="91425" rIns="91425" bIns="91425" anchor="t" anchorCtr="0">
+            <a:noAutofit/>
+          </a:bodyPr>
+          <a:lstStyle/>
+          <a:p>
+            <a:pPr marL="0" lvl="0" indent="0" algn="l" rtl="0">
+              <a:spcBef>
+                <a:spcPts val="0"/>
+              </a:spcBef>
+              <a:spcAft>
+                <a:spcPts val="0"/>
+              </a:spcAft>
+              <a:buNone/>
+            </a:pPr>
+            <a:endParaRPr/>
+          </a:p>
+        </p:txBody>
+      </p:sp>
+      <p:sp>
+        <p:nvSpPr>
+          <p:cNvPr id="100" name="Google Shape;100;p4:notes"/>
+          <p:cNvSpPr>
+            <a:spLocks noGrp="1" noRot="1" noChangeAspect="1"/>
+          </p:cNvSpPr>
+          <p:nvPr>
+            <p:ph type="sldImg" idx="2"/>
+          </p:nvPr>
+        </p:nvSpPr>
+        <p:spPr>
+          <a:xfrm>
+            <a:off x="381000" y="685800"/>
+            <a:ext cx="6096000" cy="3429000"/>
+          </a:xfrm>
+          <a:custGeom>
+            <a:avLst/>
+            <a:gdLst/>
+            <a:ahLst/>
+            <a:cxnLst/>
+            <a:rect l="l" t="t" r="r" b="b"/>
+            <a:pathLst>
+              <a:path w="120000" h="120000" extrusionOk="0">
+                <a:moveTo>
+                  <a:pt x="0" y="0"/>
+                </a:moveTo>
+                <a:lnTo>
+                  <a:pt x="120000" y="0"/>
+                </a:lnTo>
+                <a:lnTo>
+                  <a:pt x="120000" y="120000"/>
+                </a:lnTo>
+                <a:lnTo>
+                  <a:pt x="0" y="120000"/>
+                </a:lnTo>
+                <a:close/>
+              </a:path>
+            </a:pathLst>
+          </a:custGeom>
+        </p:spPr>
+      </p:sp>
+    </p:spTree>
+    <p:extLst>
+      <p:ext uri="{BB962C8B-B14F-4D97-AF65-F5344CB8AC3E}">
+        <p14:creationId xmlns:p14="http://schemas.microsoft.com/office/powerpoint/2010/main" val="1364280021"/>
+      </p:ext>
+    </p:extLst>
+  </p:cSld>
+  <p:clrMapOvr>
+    <a:masterClrMapping/>
+  </p:clrMapOvr>
+</p:notes>
+</file>
+
+<file path=ppt/notesSlides/notesSlide5.xml><?xml version="1.0" encoding="utf-8"?>
+<p:notes xmlns:a="http://schemas.openxmlformats.org/drawingml/2006/main" xmlns:r="http://schemas.openxmlformats.org/officeDocument/2006/relationships" xmlns:p="http://schemas.openxmlformats.org/presentationml/2006/main" showMasterSp="0" showMasterPhAnim="0">
+  <p:cSld>
+    <p:spTree>
+      <p:nvGrpSpPr>
         <p:cNvPr id="1" name="Shape 86"/>
         <p:cNvGrpSpPr/>
         <p:nvPr/>
@@ -1117,7 +1340,7 @@
 </p:notes>
 </file>
 
-<file path=ppt/notesSlides/notesSlide5.xml><?xml version="1.0" encoding="utf-8"?>
+<file path=ppt/notesSlides/notesSlide6.xml><?xml version="1.0" encoding="utf-8"?>
 <p:notes xmlns:a="http://schemas.openxmlformats.org/drawingml/2006/main" xmlns:r="http://schemas.openxmlformats.org/officeDocument/2006/relationships" xmlns:p="http://schemas.openxmlformats.org/presentationml/2006/main" showMasterSp="0" showMasterPhAnim="0">
   <p:cSld>
     <p:spTree>
@@ -1221,7 +1444,7 @@
 </p:notes>
 </file>
 
-<file path=ppt/notesSlides/notesSlide6.xml><?xml version="1.0" encoding="utf-8"?>
+<file path=ppt/notesSlides/notesSlide7.xml><?xml version="1.0" encoding="utf-8"?>
 <p:notes xmlns:a="http://schemas.openxmlformats.org/drawingml/2006/main" xmlns:r="http://schemas.openxmlformats.org/officeDocument/2006/relationships" xmlns:p="http://schemas.openxmlformats.org/presentationml/2006/main" showMasterSp="0" showMasterPhAnim="0">
   <p:cSld>
     <p:spTree>
@@ -1325,7 +1548,7 @@
 </p:notes>
 </file>
 
-<file path=ppt/notesSlides/notesSlide7.xml><?xml version="1.0" encoding="utf-8"?>
+<file path=ppt/notesSlides/notesSlide8.xml><?xml version="1.0" encoding="utf-8"?>
 <p:notes xmlns:a="http://schemas.openxmlformats.org/drawingml/2006/main" xmlns:r="http://schemas.openxmlformats.org/officeDocument/2006/relationships" xmlns:p="http://schemas.openxmlformats.org/presentationml/2006/main" showMasterSp="0" showMasterPhAnim="0">
   <p:cSld>
     <p:spTree>
@@ -1429,7 +1652,7 @@
 </p:notes>
 </file>
 
-<file path=ppt/notesSlides/notesSlide8.xml><?xml version="1.0" encoding="utf-8"?>
+<file path=ppt/notesSlides/notesSlide9.xml><?xml version="1.0" encoding="utf-8"?>
 <p:notes xmlns:a="http://schemas.openxmlformats.org/drawingml/2006/main" xmlns:r="http://schemas.openxmlformats.org/officeDocument/2006/relationships" xmlns:p="http://schemas.openxmlformats.org/presentationml/2006/main" showMasterSp="0" showMasterPhAnim="0">
   <p:cSld>
     <p:spTree>
@@ -1487,110 +1710,6 @@
       <p:sp>
         <p:nvSpPr>
           <p:cNvPr id="124" name="Google Shape;124;p8:notes"/>
-          <p:cNvSpPr>
-            <a:spLocks noGrp="1" noRot="1" noChangeAspect="1"/>
-          </p:cNvSpPr>
-          <p:nvPr>
-            <p:ph type="sldImg" idx="2"/>
-          </p:nvPr>
-        </p:nvSpPr>
-        <p:spPr>
-          <a:xfrm>
-            <a:off x="1143225" y="685800"/>
-            <a:ext cx="4572225" cy="3429000"/>
-          </a:xfrm>
-          <a:custGeom>
-            <a:avLst/>
-            <a:gdLst/>
-            <a:ahLst/>
-            <a:cxnLst/>
-            <a:rect l="l" t="t" r="r" b="b"/>
-            <a:pathLst>
-              <a:path w="120000" h="120000" extrusionOk="0">
-                <a:moveTo>
-                  <a:pt x="0" y="0"/>
-                </a:moveTo>
-                <a:lnTo>
-                  <a:pt x="120000" y="0"/>
-                </a:lnTo>
-                <a:lnTo>
-                  <a:pt x="120000" y="120000"/>
-                </a:lnTo>
-                <a:lnTo>
-                  <a:pt x="0" y="120000"/>
-                </a:lnTo>
-                <a:close/>
-              </a:path>
-            </a:pathLst>
-          </a:custGeom>
-        </p:spPr>
-      </p:sp>
-    </p:spTree>
-  </p:cSld>
-  <p:clrMapOvr>
-    <a:masterClrMapping/>
-  </p:clrMapOvr>
-</p:notes>
-</file>
-
-<file path=ppt/notesSlides/notesSlide9.xml><?xml version="1.0" encoding="utf-8"?>
-<p:notes xmlns:a="http://schemas.openxmlformats.org/drawingml/2006/main" xmlns:r="http://schemas.openxmlformats.org/officeDocument/2006/relationships" xmlns:p="http://schemas.openxmlformats.org/presentationml/2006/main" showMasterSp="0" showMasterPhAnim="0">
-  <p:cSld>
-    <p:spTree>
-      <p:nvGrpSpPr>
-        <p:cNvPr id="1" name="Shape 128"/>
-        <p:cNvGrpSpPr/>
-        <p:nvPr/>
-      </p:nvGrpSpPr>
-      <p:grpSpPr>
-        <a:xfrm>
-          <a:off x="0" y="0"/>
-          <a:ext cx="0" cy="0"/>
-          <a:chOff x="0" y="0"/>
-          <a:chExt cx="0" cy="0"/>
-        </a:xfrm>
-      </p:grpSpPr>
-      <p:sp>
-        <p:nvSpPr>
-          <p:cNvPr id="129" name="Google Shape;129;p9:notes"/>
-          <p:cNvSpPr txBox="1">
-            <a:spLocks noGrp="1"/>
-          </p:cNvSpPr>
-          <p:nvPr>
-            <p:ph type="body" idx="1"/>
-          </p:nvPr>
-        </p:nvSpPr>
-        <p:spPr>
-          <a:xfrm>
-            <a:off x="685800" y="4343400"/>
-            <a:ext cx="5486400" cy="4114800"/>
-          </a:xfrm>
-          <a:prstGeom prst="rect">
-            <a:avLst/>
-          </a:prstGeom>
-        </p:spPr>
-        <p:txBody>
-          <a:bodyPr spcFirstLastPara="1" wrap="square" lIns="91425" tIns="91425" rIns="91425" bIns="91425" anchor="t" anchorCtr="0">
-            <a:noAutofit/>
-          </a:bodyPr>
-          <a:lstStyle/>
-          <a:p>
-            <a:pPr marL="0" lvl="0" indent="0" algn="l" rtl="0">
-              <a:spcBef>
-                <a:spcPts val="0"/>
-              </a:spcBef>
-              <a:spcAft>
-                <a:spcPts val="0"/>
-              </a:spcAft>
-              <a:buNone/>
-            </a:pPr>
-            <a:endParaRPr/>
-          </a:p>
-        </p:txBody>
-      </p:sp>
-      <p:sp>
-        <p:nvSpPr>
-          <p:cNvPr id="130" name="Google Shape;130;p9:notes"/>
           <p:cNvSpPr>
             <a:spLocks noGrp="1" noRot="1" noChangeAspect="1"/>
           </p:cNvSpPr>
@@ -11979,10 +12098,10 @@
               <a:buNone/>
             </a:pPr>
             <a:r>
-              <a:rPr lang="en-HK" sz="2214"/>
+              <a:rPr lang="en-HK" sz="2214" dirty="0"/>
               <a:t>English Learning Platform</a:t>
             </a:r>
-            <a:endParaRPr sz="2214"/>
+            <a:endParaRPr sz="2214" dirty="0"/>
           </a:p>
           <a:p>
             <a:pPr marL="0" lvl="0" indent="0" algn="ctr" rtl="0">
@@ -12002,10 +12121,10 @@
               <a:buNone/>
             </a:pPr>
             <a:r>
-              <a:rPr lang="en-HK" sz="2214"/>
-              <a:t>6xxx Tong Chi Ching Isaac</a:t>
+              <a:rPr lang="en-HK" sz="2214" dirty="0"/>
+              <a:t>6T17 Tong Chi Ching Isaac</a:t>
             </a:r>
-            <a:endParaRPr sz="2214"/>
+            <a:endParaRPr sz="2214" dirty="0"/>
           </a:p>
         </p:txBody>
       </p:sp>
@@ -12150,7 +12269,7 @@
   <p:cSld>
     <p:spTree>
       <p:nvGrpSpPr>
-        <p:cNvPr id="1" name="Shape 95"/>
+        <p:cNvPr id="1" name="Shape 101"/>
         <p:cNvGrpSpPr/>
         <p:nvPr/>
       </p:nvGrpSpPr>
@@ -12164,7 +12283,7 @@
       </p:grpSpPr>
       <p:sp>
         <p:nvSpPr>
-          <p:cNvPr id="96" name="Google Shape;96;p15"/>
+          <p:cNvPr id="102" name="Google Shape;102;p16"/>
           <p:cNvSpPr txBox="1">
             <a:spLocks noGrp="1"/>
           </p:cNvSpPr>
@@ -12174,8 +12293,8 @@
         </p:nvSpPr>
         <p:spPr>
           <a:xfrm>
-            <a:off x="0" y="0"/>
-            <a:ext cx="12192000" cy="753600"/>
+            <a:off x="838200" y="365125"/>
+            <a:ext cx="10515600" cy="1325563"/>
           </a:xfrm>
           <a:prstGeom prst="rect">
             <a:avLst/>
@@ -12187,34 +12306,37 @@
         </p:spPr>
         <p:txBody>
           <a:bodyPr spcFirstLastPara="1" wrap="square" lIns="91425" tIns="45700" rIns="91425" bIns="45700" anchor="ctr" anchorCtr="0">
-            <a:noAutofit/>
+            <a:normAutofit/>
           </a:bodyPr>
           <a:lstStyle/>
           <a:p>
-            <a:pPr marL="457200" lvl="0" indent="-508000" algn="l" rtl="0">
-              <a:lnSpc>
-                <a:spcPct val="90000"/>
-              </a:lnSpc>
-              <a:spcBef>
-                <a:spcPts val="0"/>
-              </a:spcBef>
-              <a:spcAft>
-                <a:spcPts val="0"/>
-              </a:spcAft>
+            <a:pPr marL="571500" lvl="0" indent="-571500" algn="l" rtl="0">
+              <a:lnSpc>
+                <a:spcPct val="90000"/>
+              </a:lnSpc>
+              <a:spcBef>
+                <a:spcPts val="0"/>
+              </a:spcBef>
+              <a:spcAft>
+                <a:spcPts val="0"/>
+              </a:spcAft>
+              <a:buClr>
+                <a:schemeClr val="dk1"/>
+              </a:buClr>
               <a:buSzPts val="4400"/>
-              <a:buChar char="●"/>
+              <a:buFont typeface="Arial" panose="020B0604020202020204" pitchFamily="34" charset="0"/>
+              <a:buChar char="•"/>
             </a:pPr>
             <a:r>
-              <a:rPr lang="en-HK"/>
-              <a:t>Objectives:</a:t>
+              <a:rPr lang="en-HK" dirty="0"/>
+              <a:t>Objectives</a:t>
             </a:r>
-            <a:endParaRPr/>
           </a:p>
         </p:txBody>
       </p:sp>
       <p:sp>
         <p:nvSpPr>
-          <p:cNvPr id="97" name="Google Shape;97;p15"/>
+          <p:cNvPr id="103" name="Google Shape;103;p16"/>
           <p:cNvSpPr txBox="1">
             <a:spLocks noGrp="1"/>
           </p:cNvSpPr>
@@ -12224,8 +12346,8 @@
         </p:nvSpPr>
         <p:spPr>
           <a:xfrm>
-            <a:off x="0" y="753600"/>
-            <a:ext cx="12192000" cy="6104400"/>
+            <a:off x="838200" y="1825625"/>
+            <a:ext cx="10515600" cy="4351338"/>
           </a:xfrm>
           <a:prstGeom prst="rect">
             <a:avLst/>
@@ -12236,8 +12358,8 @@
           </a:ln>
         </p:spPr>
         <p:txBody>
-          <a:bodyPr spcFirstLastPara="1" wrap="square" lIns="91425" tIns="45700" rIns="91425" bIns="45700" anchor="ctr" anchorCtr="0">
-            <a:noAutofit/>
+          <a:bodyPr spcFirstLastPara="1" wrap="square" lIns="91425" tIns="45700" rIns="91425" bIns="45700" anchor="t" anchorCtr="0">
+            <a:normAutofit fontScale="92500" lnSpcReduction="10000"/>
           </a:bodyPr>
           <a:lstStyle/>
           <a:p>
@@ -12323,13 +12445,8 @@
             </a:r>
             <a:r>
               <a:rPr lang="en-US" dirty="0"/>
-              <a:t>: Offer three difficulty modes tailored to different proficiency levels</a:t>
+              <a:t>: Offer three difficulty modes tailored to different proficiency levels.</a:t>
             </a:r>
-            <a:r>
-              <a:rPr lang="en-HK" dirty="0"/>
-              <a:t>.</a:t>
-            </a:r>
-            <a:endParaRPr dirty="0"/>
           </a:p>
           <a:p>
             <a:pPr marL="914400" lvl="0" indent="-406400" algn="l" rtl="0">
@@ -12342,7 +12459,7 @@
               <a:buSzPts val="2800"/>
               <a:buChar char="•"/>
             </a:pPr>
-            <a:endParaRPr lang="en-HK" dirty="0"/>
+            <a:endParaRPr lang="en-US" dirty="0"/>
           </a:p>
           <a:p>
             <a:pPr marL="914400" lvl="0" indent="-406400" algn="l" rtl="0">
@@ -12389,18 +12506,22 @@
               <a:buChar char="•"/>
             </a:pPr>
             <a:r>
-              <a:rPr lang="en-HK" b="1" dirty="0"/>
+              <a:rPr lang="en-US" b="1" dirty="0"/>
               <a:t>Impact</a:t>
             </a:r>
             <a:r>
-              <a:rPr lang="en-HK" dirty="0"/>
+              <a:rPr lang="en-US" dirty="0"/>
               <a:t>: Support diverse learners, encourage active participation, and enhance language skills</a:t>
             </a:r>
-            <a:endParaRPr dirty="0"/>
           </a:p>
         </p:txBody>
       </p:sp>
     </p:spTree>
+    <p:extLst>
+      <p:ext uri="{BB962C8B-B14F-4D97-AF65-F5344CB8AC3E}">
+        <p14:creationId xmlns:p14="http://schemas.microsoft.com/office/powerpoint/2010/main" val="2105500198"/>
+      </p:ext>
+    </p:extLst>
   </p:cSld>
   <p:clrMapOvr>
     <a:masterClrMapping/>
@@ -12593,6 +12714,32 @@
               </a:spcBef>
               <a:buSzPts val="2800"/>
             </a:pPr>
+            <a:endParaRPr lang="en-US" dirty="0"/>
+          </a:p>
+          <a:p>
+            <a:pPr marL="1092200" lvl="1" indent="-457200">
+              <a:spcBef>
+                <a:spcPts val="0"/>
+              </a:spcBef>
+              <a:buSzPts val="2800"/>
+            </a:pPr>
+            <a:r>
+              <a:rPr lang="en-US" dirty="0"/>
+              <a:t>Encourage people to learn </a:t>
+            </a:r>
+            <a:r>
+              <a:rPr lang="en-US" dirty="0" err="1"/>
+              <a:t>english</a:t>
+            </a:r>
+            <a:endParaRPr lang="en-US" dirty="0"/>
+          </a:p>
+          <a:p>
+            <a:pPr marL="1092200" lvl="1" indent="-457200">
+              <a:spcBef>
+                <a:spcPts val="0"/>
+              </a:spcBef>
+              <a:buSzPts val="2800"/>
+            </a:pPr>
             <a:endParaRPr dirty="0"/>
           </a:p>
         </p:txBody>
@@ -12610,7 +12757,7 @@
   <p:cSld>
     <p:spTree>
       <p:nvGrpSpPr>
-        <p:cNvPr id="1" name=""/>
+        <p:cNvPr id="1" name="Shape 101"/>
         <p:cNvGrpSpPr/>
         <p:nvPr/>
       </p:nvGrpSpPr>
@@ -12624,60 +12771,102 @@
       </p:grpSpPr>
       <p:sp>
         <p:nvSpPr>
-          <p:cNvPr id="2" name="Title 1">
-            <a:extLst>
-              <a:ext uri="{FF2B5EF4-FFF2-40B4-BE49-F238E27FC236}">
-                <a16:creationId xmlns:a16="http://schemas.microsoft.com/office/drawing/2014/main" id="{5ADB09F3-F4F9-3CF0-305D-6AD49F098A40}"/>
-              </a:ext>
-            </a:extLst>
-          </p:cNvPr>
-          <p:cNvSpPr>
+          <p:cNvPr id="102" name="Google Shape;102;p16"/>
+          <p:cNvSpPr txBox="1">
             <a:spLocks noGrp="1"/>
           </p:cNvSpPr>
           <p:nvPr>
             <p:ph type="title"/>
           </p:nvPr>
         </p:nvSpPr>
-        <p:spPr/>
+        <p:spPr>
+          <a:xfrm>
+            <a:off x="838200" y="365125"/>
+            <a:ext cx="10515600" cy="1325563"/>
+          </a:xfrm>
+          <a:prstGeom prst="rect">
+            <a:avLst/>
+          </a:prstGeom>
+          <a:noFill/>
+          <a:ln>
+            <a:noFill/>
+          </a:ln>
+        </p:spPr>
         <p:txBody>
-          <a:bodyPr/>
+          <a:bodyPr spcFirstLastPara="1" wrap="square" lIns="91425" tIns="45700" rIns="91425" bIns="45700" anchor="ctr" anchorCtr="0">
+            <a:normAutofit/>
+          </a:bodyPr>
           <a:lstStyle/>
           <a:p>
-            <a:pPr marL="571500" indent="-571500">
+            <a:pPr marL="571500" lvl="0" indent="-571500" algn="l" rtl="0">
+              <a:lnSpc>
+                <a:spcPct val="90000"/>
+              </a:lnSpc>
+              <a:spcBef>
+                <a:spcPts val="0"/>
+              </a:spcBef>
+              <a:spcAft>
+                <a:spcPts val="0"/>
+              </a:spcAft>
+              <a:buClr>
+                <a:schemeClr val="dk1"/>
+              </a:buClr>
+              <a:buSzPts val="4400"/>
               <a:buFont typeface="Arial" panose="020B0604020202020204" pitchFamily="34" charset="0"/>
               <a:buChar char="•"/>
             </a:pPr>
             <a:r>
-              <a:rPr lang="en-HK" dirty="0"/>
+              <a:rPr lang="en-US" dirty="0"/>
               <a:t>My Function</a:t>
             </a:r>
+            <a:endParaRPr b="1" dirty="0"/>
           </a:p>
         </p:txBody>
       </p:sp>
       <p:sp>
         <p:nvSpPr>
-          <p:cNvPr id="3" name="Text Placeholder 2">
-            <a:extLst>
-              <a:ext uri="{FF2B5EF4-FFF2-40B4-BE49-F238E27FC236}">
-                <a16:creationId xmlns:a16="http://schemas.microsoft.com/office/drawing/2014/main" id="{4F4E43E8-CEA9-66A6-EE91-8D1C520424C5}"/>
-              </a:ext>
-            </a:extLst>
-          </p:cNvPr>
-          <p:cNvSpPr>
+          <p:cNvPr id="103" name="Google Shape;103;p16"/>
+          <p:cNvSpPr txBox="1">
             <a:spLocks noGrp="1"/>
           </p:cNvSpPr>
           <p:nvPr>
             <p:ph type="body" idx="1"/>
           </p:nvPr>
         </p:nvSpPr>
-        <p:spPr/>
+        <p:spPr>
+          <a:xfrm>
+            <a:off x="838200" y="1825625"/>
+            <a:ext cx="10515600" cy="4351338"/>
+          </a:xfrm>
+          <a:prstGeom prst="rect">
+            <a:avLst/>
+          </a:prstGeom>
+          <a:noFill/>
+          <a:ln>
+            <a:noFill/>
+          </a:ln>
+        </p:spPr>
         <p:txBody>
-          <a:bodyPr/>
+          <a:bodyPr spcFirstLastPara="1" wrap="square" lIns="91425" tIns="45700" rIns="91425" bIns="45700" anchor="t" anchorCtr="0">
+            <a:normAutofit/>
+          </a:bodyPr>
           <a:lstStyle/>
           <a:p>
             <a:r>
               <a:rPr lang="en-US" dirty="0"/>
-              <a:t>login</a:t>
+              <a:t>Login</a:t>
+            </a:r>
+          </a:p>
+          <a:p>
+            <a:r>
+              <a:rPr lang="en-US" dirty="0"/>
+              <a:t>Creating a new account</a:t>
+            </a:r>
+          </a:p>
+          <a:p>
+            <a:r>
+              <a:rPr lang="en-US" dirty="0"/>
+              <a:t>Deleting current account</a:t>
             </a:r>
           </a:p>
           <a:p>
@@ -12689,15 +12878,7 @@
           <a:p>
             <a:r>
               <a:rPr lang="en-US" dirty="0"/>
-              <a:t>Change </a:t>
-            </a:r>
-            <a:r>
-              <a:rPr lang="en-US" dirty="0" err="1"/>
-              <a:t>ui</a:t>
-            </a:r>
-            <a:r>
-              <a:rPr lang="en-US" dirty="0"/>
-              <a:t> theme</a:t>
+              <a:t>Change UI theme</a:t>
             </a:r>
           </a:p>
           <a:p>
@@ -12714,23 +12895,19 @@
           </a:p>
           <a:p>
             <a:r>
-              <a:rPr lang="en-US"/>
+              <a:rPr lang="en-US" dirty="0"/>
               <a:t>Profile change</a:t>
             </a:r>
-            <a:endParaRPr lang="en-US" dirty="0"/>
           </a:p>
           <a:p>
             <a:endParaRPr lang="en-US" dirty="0"/>
-          </a:p>
-          <a:p>
-            <a:endParaRPr lang="en-HK" dirty="0"/>
           </a:p>
         </p:txBody>
       </p:sp>
     </p:spTree>
     <p:extLst>
       <p:ext uri="{BB962C8B-B14F-4D97-AF65-F5344CB8AC3E}">
-        <p14:creationId xmlns:p14="http://schemas.microsoft.com/office/powerpoint/2010/main" val="1294260449"/>
+        <p14:creationId xmlns:p14="http://schemas.microsoft.com/office/powerpoint/2010/main" val="3238922820"/>
       </p:ext>
     </p:extLst>
   </p:cSld>
@@ -12786,7 +12963,7 @@
           </a:bodyPr>
           <a:lstStyle/>
           <a:p>
-            <a:pPr marL="914400" lvl="0" indent="-406400" algn="l" rtl="0">
+            <a:pPr marL="508000" lvl="0" algn="l" rtl="0">
               <a:lnSpc>
                 <a:spcPct val="100000"/>
               </a:lnSpc>
@@ -12797,159 +12974,7 @@
                 <a:spcPts val="0"/>
               </a:spcAft>
               <a:buSzPts val="2800"/>
-              <a:buFont typeface="Arial"/>
-              <a:buChar char="●"/>
             </a:pPr>
-            <a:r>
-              <a:rPr lang="en-HK" sz="2800" dirty="0">
-                <a:latin typeface="Arial"/>
-                <a:ea typeface="Arial"/>
-                <a:cs typeface="Arial"/>
-                <a:sym typeface="Arial"/>
-              </a:rPr>
-              <a:t>The design phase involved creating a comprehensive</a:t>
-            </a:r>
-            <a:r>
-              <a:rPr lang="en-HK" sz="2800" b="1" dirty="0">
-                <a:latin typeface="Arial"/>
-                <a:ea typeface="Arial"/>
-                <a:cs typeface="Arial"/>
-                <a:sym typeface="Arial"/>
-              </a:rPr>
-              <a:t> </a:t>
-            </a:r>
-            <a:r>
-              <a:rPr lang="en-HK" sz="2800" dirty="0">
-                <a:latin typeface="Arial"/>
-                <a:ea typeface="Arial"/>
-                <a:cs typeface="Arial"/>
-                <a:sym typeface="Arial"/>
-              </a:rPr>
-              <a:t>blueprint for the English learning platform, focusing on </a:t>
-            </a:r>
-            <a:r>
-              <a:rPr lang="en-HK" sz="2800" b="1" dirty="0">
-                <a:latin typeface="Arial"/>
-                <a:ea typeface="Arial"/>
-                <a:cs typeface="Arial"/>
-                <a:sym typeface="Arial"/>
-              </a:rPr>
-              <a:t>user interface, system architecture</a:t>
-            </a:r>
-            <a:r>
-              <a:rPr lang="en-HK" sz="2800" dirty="0">
-                <a:latin typeface="Arial"/>
-                <a:ea typeface="Arial"/>
-                <a:cs typeface="Arial"/>
-                <a:sym typeface="Arial"/>
-              </a:rPr>
-              <a:t>, and </a:t>
-            </a:r>
-            <a:r>
-              <a:rPr lang="en-HK" sz="2800" b="1" dirty="0">
-                <a:latin typeface="Arial"/>
-                <a:ea typeface="Arial"/>
-                <a:cs typeface="Arial"/>
-                <a:sym typeface="Arial"/>
-              </a:rPr>
-              <a:t>core functionalities</a:t>
-            </a:r>
-            <a:r>
-              <a:rPr lang="en-HK" sz="2800" dirty="0">
-                <a:latin typeface="Arial"/>
-                <a:ea typeface="Arial"/>
-                <a:cs typeface="Arial"/>
-                <a:sym typeface="Arial"/>
-              </a:rPr>
-              <a:t>. Thus I focus on</a:t>
-            </a:r>
-            <a:r>
-              <a:rPr lang="en-HK" sz="2800" b="1" dirty="0">
-                <a:latin typeface="Arial"/>
-                <a:ea typeface="Arial"/>
-                <a:cs typeface="Arial"/>
-                <a:sym typeface="Arial"/>
-              </a:rPr>
-              <a:t> a very user friendly interface</a:t>
-            </a:r>
-            <a:r>
-              <a:rPr lang="en-HK" sz="2800" dirty="0">
-                <a:latin typeface="Arial"/>
-                <a:ea typeface="Arial"/>
-                <a:cs typeface="Arial"/>
-                <a:sym typeface="Arial"/>
-              </a:rPr>
-              <a:t> for the user to use.</a:t>
-            </a:r>
-            <a:endParaRPr sz="2800" dirty="0">
-              <a:latin typeface="Arial"/>
-              <a:ea typeface="Arial"/>
-              <a:cs typeface="Arial"/>
-              <a:sym typeface="Arial"/>
-            </a:endParaRPr>
-          </a:p>
-          <a:p>
-            <a:pPr marL="0" lvl="0" indent="0" algn="l" rtl="0">
-              <a:lnSpc>
-                <a:spcPct val="100000"/>
-              </a:lnSpc>
-              <a:spcBef>
-                <a:spcPts val="0"/>
-              </a:spcBef>
-              <a:spcAft>
-                <a:spcPts val="0"/>
-              </a:spcAft>
-              <a:buNone/>
-            </a:pPr>
-            <a:endParaRPr sz="2800" dirty="0">
-              <a:latin typeface="Arial"/>
-              <a:ea typeface="Arial"/>
-              <a:cs typeface="Arial"/>
-              <a:sym typeface="Arial"/>
-            </a:endParaRPr>
-          </a:p>
-          <a:p>
-            <a:pPr marL="914400" lvl="0" indent="-406400" algn="l" rtl="0">
-              <a:lnSpc>
-                <a:spcPct val="100000"/>
-              </a:lnSpc>
-              <a:spcBef>
-                <a:spcPts val="0"/>
-              </a:spcBef>
-              <a:spcAft>
-                <a:spcPts val="0"/>
-              </a:spcAft>
-              <a:buSzPts val="2800"/>
-              <a:buFont typeface="Arial"/>
-              <a:buChar char="●"/>
-            </a:pPr>
-            <a:r>
-              <a:rPr lang="en-HK" sz="2800" dirty="0">
-                <a:latin typeface="Arial"/>
-                <a:ea typeface="Arial"/>
-                <a:cs typeface="Arial"/>
-                <a:sym typeface="Arial"/>
-              </a:rPr>
-              <a:t>During the implementation phase, the design was translated into a functional system through coding and software development. This included developing the frontend interface, setting up </a:t>
-            </a:r>
-            <a:r>
-              <a:rPr lang="en-HK" sz="2800" b="1" dirty="0">
-                <a:latin typeface="Arial"/>
-                <a:ea typeface="Arial"/>
-                <a:cs typeface="Arial"/>
-                <a:sym typeface="Arial"/>
-              </a:rPr>
-              <a:t>backend coding, adding databases, and ensuring smooth operation </a:t>
-            </a:r>
-            <a:r>
-              <a:rPr lang="en-HK" sz="2800" dirty="0">
-                <a:latin typeface="Arial"/>
-                <a:ea typeface="Arial"/>
-                <a:cs typeface="Arial"/>
-                <a:sym typeface="Arial"/>
-              </a:rPr>
-              <a:t>across different devices. Rigorous testing was conducted throughout the implementation process to identify and resolve any issues, resulting in user-friendly learning platform that meets the specified requirements.</a:t>
-            </a:r>
             <a:endParaRPr sz="2800" dirty="0">
               <a:latin typeface="Arial"/>
               <a:ea typeface="Arial"/>
@@ -12984,7 +13009,7 @@
           </a:bodyPr>
           <a:lstStyle/>
           <a:p>
-            <a:pPr marL="457200" lvl="0" indent="-508000" algn="l" rtl="0">
+            <a:pPr lvl="0" algn="l" rtl="0">
               <a:lnSpc>
                 <a:spcPct val="90000"/>
               </a:lnSpc>
@@ -12998,11 +13023,9 @@
                 <a:schemeClr val="dk1"/>
               </a:buClr>
               <a:buSzPts val="4400"/>
-              <a:buFont typeface="Play"/>
-              <a:buChar char="●"/>
             </a:pPr>
             <a:r>
-              <a:rPr lang="en-HK" sz="4400">
+              <a:rPr lang="en-HK" sz="4400" dirty="0">
                 <a:solidFill>
                   <a:schemeClr val="dk1"/>
                 </a:solidFill>
@@ -13013,7 +13036,7 @@
               </a:rPr>
               <a:t>Design and Implementation:</a:t>
             </a:r>
-            <a:endParaRPr sz="2800">
+            <a:endParaRPr sz="2800" dirty="0">
               <a:solidFill>
                 <a:schemeClr val="dk1"/>
               </a:solidFill>
